--- a/docs/발표/Perky_IR덱.pptx
+++ b/docs/발표/Perky_IR덱.pptx
@@ -6476,7 +6476,7 @@
                 </a:solidFill>
                 <a:latin typeface="Malgun Gothic"/>
               </a:rPr>
-              <a:t>250</a:t>
+              <a:t>261</a:t>
             </a:r>
           </a:p>
         </p:txBody>
@@ -6600,7 +6600,7 @@
                 </a:solidFill>
                 <a:latin typeface="Malgun Gothic"/>
               </a:rPr>
-              <a:t>56</a:t>
+              <a:t>60</a:t>
             </a:r>
           </a:p>
         </p:txBody>
@@ -6639,7 +6639,7 @@
                 </a:solidFill>
                 <a:latin typeface="Malgun Gothic"/>
               </a:rPr>
-              <a:t>PR · 커밋 120개</a:t>
+              <a:t>PR · 커밋 115개</a:t>
             </a:r>
           </a:p>
         </p:txBody>

--- a/docs/발표/Perky_IR덱.pptx
+++ b/docs/발표/Perky_IR덱.pptx
@@ -6476,7 +6476,7 @@
                 </a:solidFill>
                 <a:latin typeface="Malgun Gothic"/>
               </a:rPr>
-              <a:t>261</a:t>
+              <a:t>263</a:t>
             </a:r>
           </a:p>
         </p:txBody>
@@ -6600,7 +6600,7 @@
                 </a:solidFill>
                 <a:latin typeface="Malgun Gothic"/>
               </a:rPr>
-              <a:t>60</a:t>
+              <a:t>61</a:t>
             </a:r>
           </a:p>
         </p:txBody>
@@ -6639,7 +6639,7 @@
                 </a:solidFill>
                 <a:latin typeface="Malgun Gothic"/>
               </a:rPr>
-              <a:t>PR · 커밋 115개</a:t>
+              <a:t>PR · 커밋 119개</a:t>
             </a:r>
           </a:p>
         </p:txBody>

--- a/docs/발표/Perky_IR덱.pptx
+++ b/docs/발표/Perky_IR덱.pptx
@@ -6600,7 +6600,7 @@
                 </a:solidFill>
                 <a:latin typeface="Malgun Gothic"/>
               </a:rPr>
-              <a:t>61</a:t>
+              <a:t>62</a:t>
             </a:r>
           </a:p>
         </p:txBody>
@@ -6639,7 +6639,7 @@
                 </a:solidFill>
                 <a:latin typeface="Malgun Gothic"/>
               </a:rPr>
-              <a:t>PR · 커밋 119개</a:t>
+              <a:t>PR · 커밋 120+</a:t>
             </a:r>
           </a:p>
         </p:txBody>

--- a/docs/발표/Perky_IR덱.pptx
+++ b/docs/발표/Perky_IR덱.pptx
@@ -6476,7 +6476,7 @@
                 </a:solidFill>
                 <a:latin typeface="Malgun Gothic"/>
               </a:rPr>
-              <a:t>263</a:t>
+              <a:t>270</a:t>
             </a:r>
           </a:p>
         </p:txBody>
@@ -6600,7 +6600,7 @@
                 </a:solidFill>
                 <a:latin typeface="Malgun Gothic"/>
               </a:rPr>
-              <a:t>62</a:t>
+              <a:t>65</a:t>
             </a:r>
           </a:p>
         </p:txBody>

--- a/docs/발표/Perky_IR덱.pptx
+++ b/docs/발표/Perky_IR덱.pptx
@@ -6476,7 +6476,7 @@
                 </a:solidFill>
                 <a:latin typeface="Malgun Gothic"/>
               </a:rPr>
-              <a:t>270</a:t>
+              <a:t>270+</a:t>
             </a:r>
           </a:p>
         </p:txBody>
@@ -6600,7 +6600,7 @@
                 </a:solidFill>
                 <a:latin typeface="Malgun Gothic"/>
               </a:rPr>
-              <a:t>65</a:t>
+              <a:t>67</a:t>
             </a:r>
           </a:p>
         </p:txBody>
